--- a/dist/초5/수학/자료/초5_수학_자료_02_일이일어날가능성_학생용.pptx
+++ b/dist/초5/수학/자료/초5_수학_자료_02_일이일어날가능성_학생용.pptx
@@ -118,19 +118,19 @@
   <p:extLst>
     <p:ext uri="{521415D9-36F7-43E2-AB2F-B90AF26B5E84}">
       <p14:sectionLst xmlns:p14="http://schemas.microsoft.com/office/powerpoint/2010/main">
-        <p14:section name="도입" id="{1a55cd2a-3d09-46c5-ac8a-ec139008277d}">
+        <p14:section name="도입" id="{69c1b110-3ad2-4743-820f-487accac1588}">
           <p14:sldIdLst>
             <p14:sldId id="256"/>
             <p14:sldId id="257"/>
           </p14:sldIdLst>
         </p14:section>
-        <p14:section name="개념" id="{82632816-787b-20c3-bc77-5f69b9acce7a}">
+        <p14:section name="개념" id="{9eb7d9f8-0dd4-d6a6-457e-0f87d3e2fbf3}">
           <p14:sldIdLst>
             <p14:sldId id="258"/>
             <p14:sldId id="261"/>
           </p14:sldIdLst>
         </p14:section>
-        <p14:section name="연습" id="{f6c1c78a-b739-ca40-34fb-1efb6fc681dc}">
+        <p14:section name="연습" id="{769bb6a9-caf3-aa38-c161-fe8e05148ef9}">
           <p14:sldIdLst>
             <p14:sldId id="259"/>
             <p14:sldId id="260"/>
@@ -138,24 +138,24 @@
             <p14:sldId id="263"/>
           </p14:sldIdLst>
         </p14:section>
-        <p14:section name="개념" id="{86f57751-2567-5fb1-e091-a81bbb08a7a1}">
+        <p14:section name="개념" id="{24fdac3e-72ba-66f3-34a1-a9b34fd35ca8}">
           <p14:sldIdLst/>
         </p14:section>
-        <p14:section name="연습" id="{3acc3e79-2528-daf0-043f-ea3b97b61a79}">
+        <p14:section name="연습" id="{da4f397b-21a6-213c-8999-cb4ef60f611f}">
           <p14:sldIdLst/>
         </p14:section>
-        <p14:section name="확인" id="{fb52c172-5212-6c7e-5414-c548f6479286}">
+        <p14:section name="확인" id="{dceb969b-82b7-693c-3e69-667843fe1bcf}">
           <p14:sldIdLst>
             <p14:sldId id="264"/>
             <p14:sldId id="265"/>
           </p14:sldIdLst>
         </p14:section>
-        <p14:section name="정리" id="{1c696324-316c-249e-7ac5-54e15e522ce2}">
+        <p14:section name="정리" id="{f7a6dc17-d9dd-e39c-86a0-2d97203db4f8}">
           <p14:sldIdLst>
             <p14:sldId id="266"/>
           </p14:sldIdLst>
         </p14:section>
-        <p14:section name="보충" id="{dad723ab-b100-f5fe-0c86-de2e93c67dde}">
+        <p14:section name="보충" id="{33d315f6-6436-3fc7-de98-049654363179}">
           <p14:sldIdLst>
             <p14:sldId id="267"/>
           </p14:sldIdLst>
